--- a/demo_site/files/slides/lecture27_p_np2.pptx
+++ b/demo_site/files/slides/lecture27_p_np2.pptx
@@ -3739,24 +3739,23 @@
           <a:p>
             <a:r>
               <a:rPr lang="en-US" dirty="0"/>
-              <a:t>CSE 332 Winter 2026</a:t>
+              <a:t>CSE </a:t>
+            </a:r>
+            <a:r>
+              <a:rPr lang="en-US"/>
+              <a:t>332 Spring </a:t>
+            </a:r>
+            <a:r>
+              <a:rPr lang="en-US" dirty="0"/>
+              <a:t>2026</a:t>
             </a:r>
             <a:br>
               <a:rPr lang="en-US" dirty="0"/>
             </a:br>
             <a:r>
-              <a:rPr lang="en-US"/>
-              <a:t>Lecture 26: </a:t>
+              <a:rPr lang="en-US" dirty="0"/>
+              <a:t>Lecture 27: P and NP 2</a:t>
             </a:r>
-            <a:r>
-              <a:rPr lang="en-US" dirty="0"/>
-              <a:t>P </a:t>
-            </a:r>
-            <a:r>
-              <a:rPr lang="en-US"/>
-              <a:t>and NP 2</a:t>
-            </a:r>
-            <a:endParaRPr lang="en-US" dirty="0"/>
           </a:p>
         </p:txBody>
       </p:sp>

--- a/demo_site/files/slides/lecture27_p_np2.pptx
+++ b/demo_site/files/slides/lecture27_p_np2.pptx
@@ -28316,8 +28316,8 @@
           <a:chExt cx="0" cy="0"/>
         </a:xfrm>
       </p:grpSpPr>
-      <mc:AlternateContent xmlns:mc="http://schemas.openxmlformats.org/markup-compatibility/2006">
-        <mc:Choice xmlns:a14="http://schemas.microsoft.com/office/drawing/2010/main" Requires="a14">
+      <mc:AlternateContent xmlns:mc="http://schemas.openxmlformats.org/markup-compatibility/2006" xmlns:a14="http://schemas.microsoft.com/office/drawing/2010/main">
+        <mc:Choice Requires="a14">
           <p:sp>
             <p:nvSpPr>
               <p:cNvPr id="2" name="Title 1">
@@ -28370,7 +28370,7 @@
             </p:txBody>
           </p:sp>
         </mc:Choice>
-        <mc:Fallback>
+        <mc:Fallback xmlns="">
           <p:sp>
             <p:nvSpPr>
               <p:cNvPr id="2" name="Title 1">
@@ -28410,8 +28410,8 @@
           </p:sp>
         </mc:Fallback>
       </mc:AlternateContent>
-      <mc:AlternateContent xmlns:mc="http://schemas.openxmlformats.org/markup-compatibility/2006">
-        <mc:Choice xmlns:a14="http://schemas.microsoft.com/office/drawing/2010/main" Requires="a14">
+      <mc:AlternateContent xmlns:mc="http://schemas.openxmlformats.org/markup-compatibility/2006" xmlns:a14="http://schemas.microsoft.com/office/drawing/2010/main">
+        <mc:Choice Requires="a14">
           <p:sp>
             <p:nvSpPr>
               <p:cNvPr id="3" name="Content Placeholder 2">
@@ -29161,7 +29161,7 @@
             </p:txBody>
           </p:sp>
         </mc:Choice>
-        <mc:Fallback>
+        <mc:Fallback xmlns="">
           <p:sp>
             <p:nvSpPr>
               <p:cNvPr id="3" name="Content Placeholder 2">
@@ -29253,8 +29253,8 @@
           </a:p>
         </p:txBody>
       </p:sp>
-      <mc:AlternateContent xmlns:mc="http://schemas.openxmlformats.org/markup-compatibility/2006">
-        <mc:Choice xmlns:a14="http://schemas.microsoft.com/office/drawing/2010/main" Requires="a14">
+      <mc:AlternateContent xmlns:mc="http://schemas.openxmlformats.org/markup-compatibility/2006" xmlns:a14="http://schemas.microsoft.com/office/drawing/2010/main">
+        <mc:Choice Requires="a14">
           <p:graphicFrame>
             <p:nvGraphicFramePr>
               <p:cNvPr id="3" name="Table 2">
@@ -29362,6 +29362,7 @@
                         <a:bodyPr/>
                         <a:lstStyle/>
                         <a:p>
+                          <a:pPr/>
                           <a14:m>
                             <m:oMathPara xmlns:m="http://schemas.openxmlformats.org/officeDocument/2006/math">
                               <m:oMathParaPr>
@@ -29399,6 +29400,7 @@
                         <a:bodyPr/>
                         <a:lstStyle/>
                         <a:p>
+                          <a:pPr/>
                           <a14:m>
                             <m:oMathPara xmlns:m="http://schemas.openxmlformats.org/officeDocument/2006/math">
                               <m:oMathParaPr>
@@ -29840,7 +29842,7 @@
             </a:graphic>
           </p:graphicFrame>
         </mc:Choice>
-        <mc:Fallback>
+        <mc:Fallback xmlns="">
           <p:graphicFrame>
             <p:nvGraphicFramePr>
               <p:cNvPr id="3" name="Table 2">
